--- a/Manuscript/structure_image/overall.pptx
+++ b/Manuscript/structure_image/overall.pptx
@@ -17263,9 +17263,26 @@
                 <a:ea typeface="Calibri" panose="020F0502020204030204"/>
                 <a:cs typeface="Calibri" panose="020F0502020204030204"/>
               </a:rPr>
-              <a:t>Student: lightweight LNN</a:t>
+              <a:t>Student: </a:t>
             </a:r>
-            <a:endParaRPr kumimoji="0" sz="2300" b="1" i="0" u="none" strike="noStrike" kern="1200" cap="none" spc="0" normalizeH="0" baseline="0" noProof="0" dirty="0">
+            <a:r>
+              <a:rPr kumimoji="0" lang="en-US" altLang="zh-CN" sz="2300" b="1" i="0" u="none" strike="noStrike" kern="1200" cap="none" spc="0" normalizeH="0" baseline="0" noProof="0" dirty="0">
+                <a:ln>
+                  <a:noFill/>
+                </a:ln>
+                <a:solidFill>
+                  <a:srgbClr val="188326"/>
+                </a:solidFill>
+                <a:effectLst/>
+                <a:uLnTx/>
+                <a:uFillTx/>
+                <a:latin typeface="Comic Sans MS" panose="030F0702030302020204" pitchFamily="66" charset="0"/>
+                <a:ea typeface="Calibri" panose="020F0502020204030204"/>
+                <a:cs typeface="Calibri" panose="020F0502020204030204"/>
+              </a:rPr>
+              <a:t>BiTAL Network</a:t>
+            </a:r>
+            <a:endParaRPr kumimoji="0" lang="en-US" altLang="zh-CN" sz="2300" b="1" i="0" u="none" strike="noStrike" kern="1200" cap="none" spc="0" normalizeH="0" baseline="0" noProof="0" dirty="0">
               <a:ln>
                 <a:noFill/>
               </a:ln>
